--- a/crypto_02_Ether_POS.pptx
+++ b/crypto_02_Ether_POS.pptx
@@ -5,7 +5,7 @@
     <p:sldMasterId id="2147483648" r:id="rId1"/>
   </p:sldMasterIdLst>
   <p:notesMasterIdLst>
-    <p:notesMasterId r:id="rId9"/>
+    <p:notesMasterId r:id="rId10"/>
   </p:notesMasterIdLst>
   <p:sldIdLst>
     <p:sldId id="284" r:id="rId2"/>
@@ -15,6 +15,7 @@
     <p:sldId id="292" r:id="rId6"/>
     <p:sldId id="289" r:id="rId7"/>
     <p:sldId id="290" r:id="rId8"/>
+    <p:sldId id="293" r:id="rId9"/>
   </p:sldIdLst>
   <p:sldSz cx="12192000" cy="6858000"/>
   <p:notesSz cx="6858000" cy="9144000"/>
@@ -202,7 +203,7 @@
           </a:lstStyle>
           <a:p>
             <a:fld id="{1D50B18A-2CB0-B248-A23A-CF200D8516DA}" type="datetimeFigureOut">
-              <a:t>4/10/22</a:t>
+              <a:t>5/17/22</a:t>
             </a:fld>
             <a:endParaRPr lang="en-US"/>
           </a:p>
@@ -746,7 +747,7 @@
           <a:lstStyle/>
           <a:p>
             <a:fld id="{6FB464A9-1D0A-E949-92B2-EB494C191964}" type="datetimeFigureOut">
-              <a:t>4/10/22</a:t>
+              <a:t>5/17/22</a:t>
             </a:fld>
             <a:endParaRPr lang="en-US"/>
           </a:p>
@@ -942,7 +943,7 @@
           <a:lstStyle/>
           <a:p>
             <a:fld id="{6FB464A9-1D0A-E949-92B2-EB494C191964}" type="datetimeFigureOut">
-              <a:t>4/10/22</a:t>
+              <a:t>5/17/22</a:t>
             </a:fld>
             <a:endParaRPr lang="en-US"/>
           </a:p>
@@ -1148,7 +1149,7 @@
           <a:lstStyle/>
           <a:p>
             <a:fld id="{6FB464A9-1D0A-E949-92B2-EB494C191964}" type="datetimeFigureOut">
-              <a:t>4/10/22</a:t>
+              <a:t>5/17/22</a:t>
             </a:fld>
             <a:endParaRPr lang="en-US"/>
           </a:p>
@@ -1344,7 +1345,7 @@
           <a:lstStyle/>
           <a:p>
             <a:fld id="{6FB464A9-1D0A-E949-92B2-EB494C191964}" type="datetimeFigureOut">
-              <a:t>4/10/22</a:t>
+              <a:t>5/17/22</a:t>
             </a:fld>
             <a:endParaRPr lang="en-US"/>
           </a:p>
@@ -1617,7 +1618,7 @@
           <a:lstStyle/>
           <a:p>
             <a:fld id="{6FB464A9-1D0A-E949-92B2-EB494C191964}" type="datetimeFigureOut">
-              <a:t>4/10/22</a:t>
+              <a:t>5/17/22</a:t>
             </a:fld>
             <a:endParaRPr lang="en-US"/>
           </a:p>
@@ -1880,7 +1881,7 @@
           <a:lstStyle/>
           <a:p>
             <a:fld id="{6FB464A9-1D0A-E949-92B2-EB494C191964}" type="datetimeFigureOut">
-              <a:t>4/10/22</a:t>
+              <a:t>5/17/22</a:t>
             </a:fld>
             <a:endParaRPr lang="en-US"/>
           </a:p>
@@ -2290,7 +2291,7 @@
           <a:lstStyle/>
           <a:p>
             <a:fld id="{6FB464A9-1D0A-E949-92B2-EB494C191964}" type="datetimeFigureOut">
-              <a:t>4/10/22</a:t>
+              <a:t>5/17/22</a:t>
             </a:fld>
             <a:endParaRPr lang="en-US"/>
           </a:p>
@@ -2429,7 +2430,7 @@
           <a:lstStyle/>
           <a:p>
             <a:fld id="{6FB464A9-1D0A-E949-92B2-EB494C191964}" type="datetimeFigureOut">
-              <a:t>4/10/22</a:t>
+              <a:t>5/17/22</a:t>
             </a:fld>
             <a:endParaRPr lang="en-US"/>
           </a:p>
@@ -2540,7 +2541,7 @@
           <a:lstStyle/>
           <a:p>
             <a:fld id="{6FB464A9-1D0A-E949-92B2-EB494C191964}" type="datetimeFigureOut">
-              <a:t>4/10/22</a:t>
+              <a:t>5/17/22</a:t>
             </a:fld>
             <a:endParaRPr lang="en-US"/>
           </a:p>
@@ -2849,7 +2850,7 @@
           <a:lstStyle/>
           <a:p>
             <a:fld id="{6FB464A9-1D0A-E949-92B2-EB494C191964}" type="datetimeFigureOut">
-              <a:t>4/10/22</a:t>
+              <a:t>5/17/22</a:t>
             </a:fld>
             <a:endParaRPr lang="en-US"/>
           </a:p>
@@ -3135,7 +3136,7 @@
           <a:lstStyle/>
           <a:p>
             <a:fld id="{6FB464A9-1D0A-E949-92B2-EB494C191964}" type="datetimeFigureOut">
-              <a:t>4/10/22</a:t>
+              <a:t>5/17/22</a:t>
             </a:fld>
             <a:endParaRPr lang="en-US"/>
           </a:p>
@@ -3374,7 +3375,7 @@
           </a:lstStyle>
           <a:p>
             <a:fld id="{6FB464A9-1D0A-E949-92B2-EB494C191964}" type="datetimeFigureOut">
-              <a:t>4/10/22</a:t>
+              <a:t>5/17/22</a:t>
             </a:fld>
             <a:endParaRPr lang="en-US"/>
           </a:p>
@@ -6889,6 +6890,241 @@
     <p:extLst>
       <p:ext uri="{BB962C8B-B14F-4D97-AF65-F5344CB8AC3E}">
         <p14:creationId xmlns:p14="http://schemas.microsoft.com/office/powerpoint/2010/main" val="4257555068"/>
+      </p:ext>
+    </p:extLst>
+  </p:cSld>
+  <p:clrMapOvr>
+    <a:masterClrMapping/>
+  </p:clrMapOvr>
+</p:sld>
+</file>
+
+<file path=ppt/slides/slide8.xml><?xml version="1.0" encoding="utf-8"?>
+<p:sld xmlns:a="http://schemas.openxmlformats.org/drawingml/2006/main" xmlns:r="http://schemas.openxmlformats.org/officeDocument/2006/relationships" xmlns:p="http://schemas.openxmlformats.org/presentationml/2006/main">
+  <p:cSld>
+    <p:spTree>
+      <p:nvGrpSpPr>
+        <p:cNvPr id="1" name=""/>
+        <p:cNvGrpSpPr/>
+        <p:nvPr/>
+      </p:nvGrpSpPr>
+      <p:grpSpPr>
+        <a:xfrm>
+          <a:off x="0" y="0"/>
+          <a:ext cx="0" cy="0"/>
+          <a:chOff x="0" y="0"/>
+          <a:chExt cx="0" cy="0"/>
+        </a:xfrm>
+      </p:grpSpPr>
+      <p:sp>
+        <p:nvSpPr>
+          <p:cNvPr id="2" name="TextBox 1">
+            <a:extLst>
+              <a:ext uri="{FF2B5EF4-FFF2-40B4-BE49-F238E27FC236}">
+                <a16:creationId xmlns:a16="http://schemas.microsoft.com/office/drawing/2014/main" id="{83A8BCCB-F7CF-047C-DFAB-F04C832EC412}"/>
+              </a:ext>
+            </a:extLst>
+          </p:cNvPr>
+          <p:cNvSpPr txBox="1"/>
+          <p:nvPr/>
+        </p:nvSpPr>
+        <p:spPr>
+          <a:xfrm>
+            <a:off x="0" y="0"/>
+            <a:ext cx="4015047" cy="369332"/>
+          </a:xfrm>
+          <a:prstGeom prst="rect">
+            <a:avLst/>
+          </a:prstGeom>
+          <a:noFill/>
+        </p:spPr>
+        <p:txBody>
+          <a:bodyPr wrap="square" rtlCol="0">
+            <a:spAutoFit/>
+          </a:bodyPr>
+          <a:lstStyle/>
+          <a:p>
+            <a:r>
+              <a:rPr lang="en-US" b="1"/>
+              <a:t>Will BlackRock Take Over Ethereum?</a:t>
+            </a:r>
+          </a:p>
+        </p:txBody>
+      </p:sp>
+      <p:sp>
+        <p:nvSpPr>
+          <p:cNvPr id="3" name="TextBox 2">
+            <a:extLst>
+              <a:ext uri="{FF2B5EF4-FFF2-40B4-BE49-F238E27FC236}">
+                <a16:creationId xmlns:a16="http://schemas.microsoft.com/office/drawing/2014/main" id="{558E268B-1421-8D3F-719D-EE8EF6D862C3}"/>
+              </a:ext>
+            </a:extLst>
+          </p:cNvPr>
+          <p:cNvSpPr txBox="1"/>
+          <p:nvPr/>
+        </p:nvSpPr>
+        <p:spPr>
+          <a:xfrm>
+            <a:off x="241069" y="866044"/>
+            <a:ext cx="4131425" cy="523220"/>
+          </a:xfrm>
+          <a:prstGeom prst="rect">
+            <a:avLst/>
+          </a:prstGeom>
+          <a:noFill/>
+        </p:spPr>
+        <p:txBody>
+          <a:bodyPr wrap="square" rtlCol="0">
+            <a:spAutoFit/>
+          </a:bodyPr>
+          <a:lstStyle/>
+          <a:p>
+            <a:r>
+              <a:rPr lang="en-US" sz="1400"/>
+              <a:t>Will BlackRock Take Over Ethereum?</a:t>
+            </a:r>
+            <a:br>
+              <a:rPr lang="en-US" sz="1400"/>
+            </a:br>
+            <a:r>
+              <a:rPr lang="en-US" sz="1400">
+                <a:hlinkClick r:id="rId2"/>
+              </a:rPr>
+              <a:t>https://www.youtube.com/watch?v=T3tkmTByWIg</a:t>
+            </a:r>
+            <a:endParaRPr lang="en-US" sz="1400"/>
+          </a:p>
+        </p:txBody>
+      </p:sp>
+      <p:sp>
+        <p:nvSpPr>
+          <p:cNvPr id="4" name="TextBox 3">
+            <a:extLst>
+              <a:ext uri="{FF2B5EF4-FFF2-40B4-BE49-F238E27FC236}">
+                <a16:creationId xmlns:a16="http://schemas.microsoft.com/office/drawing/2014/main" id="{3F99A88E-A7A4-F1E0-0A65-319666F191E0}"/>
+              </a:ext>
+            </a:extLst>
+          </p:cNvPr>
+          <p:cNvSpPr txBox="1"/>
+          <p:nvPr/>
+        </p:nvSpPr>
+        <p:spPr>
+          <a:xfrm>
+            <a:off x="241069" y="1571105"/>
+            <a:ext cx="4680066" cy="2677656"/>
+          </a:xfrm>
+          <a:prstGeom prst="rect">
+            <a:avLst/>
+          </a:prstGeom>
+          <a:solidFill>
+            <a:schemeClr val="accent4">
+              <a:lumMod val="20000"/>
+              <a:lumOff val="80000"/>
+            </a:schemeClr>
+          </a:solidFill>
+          <a:ln>
+            <a:solidFill>
+              <a:schemeClr val="accent1"/>
+            </a:solidFill>
+          </a:ln>
+        </p:spPr>
+        <p:txBody>
+          <a:bodyPr wrap="square" rtlCol="0">
+            <a:spAutoFit/>
+          </a:bodyPr>
+          <a:lstStyle/>
+          <a:p>
+            <a:pPr marL="285750" indent="-285750">
+              <a:buFont typeface="Arial" panose="020B0604020202020204" pitchFamily="34" charset="0"/>
+              <a:buChar char="•"/>
+            </a:pPr>
+            <a:r>
+              <a:rPr lang="en-US" sz="1400"/>
+              <a:t>Ethereum is moving to POS concensus</a:t>
+            </a:r>
+          </a:p>
+          <a:p>
+            <a:pPr marL="285750" indent="-285750">
+              <a:buFont typeface="Arial" panose="020B0604020202020204" pitchFamily="34" charset="0"/>
+              <a:buChar char="•"/>
+            </a:pPr>
+            <a:r>
+              <a:rPr lang="en-US" sz="1400"/>
+              <a:t>BlackRock has more than $10 Trillion under management</a:t>
+            </a:r>
+          </a:p>
+          <a:p>
+            <a:pPr marL="285750" indent="-285750">
+              <a:buFont typeface="Arial" panose="020B0604020202020204" pitchFamily="34" charset="0"/>
+              <a:buChar char="•"/>
+            </a:pPr>
+            <a:r>
+              <a:rPr lang="en-US" sz="1400"/>
+              <a:t>BlackRock, Goldman Sachs, etc.  can borrow money from the Fed at very low rate (much lower than anyone else), and then stake at Ethereum at higher rate. Thus making money on the spread. And the more they stake – the more money they make.</a:t>
+            </a:r>
+          </a:p>
+          <a:p>
+            <a:pPr marL="285750" indent="-285750">
+              <a:buFont typeface="Arial" panose="020B0604020202020204" pitchFamily="34" charset="0"/>
+              <a:buChar char="•"/>
+            </a:pPr>
+            <a:r>
+              <a:rPr lang="en-US" sz="1400"/>
+              <a:t>These huge companies can stake huge amounts on Ethereum – thus influencing the network.</a:t>
+            </a:r>
+          </a:p>
+          <a:p>
+            <a:pPr marL="285750" indent="-285750">
+              <a:buFont typeface="Arial" panose="020B0604020202020204" pitchFamily="34" charset="0"/>
+              <a:buChar char="•"/>
+            </a:pPr>
+            <a:r>
+              <a:rPr lang="en-US" sz="1400"/>
+              <a:t>These companies are "in bed" with government – thus putting the whole network under government influence and/or control.</a:t>
+            </a:r>
+          </a:p>
+        </p:txBody>
+      </p:sp>
+      <p:pic>
+        <p:nvPicPr>
+          <p:cNvPr id="5" name="Picture 4">
+            <a:extLst>
+              <a:ext uri="{FF2B5EF4-FFF2-40B4-BE49-F238E27FC236}">
+                <a16:creationId xmlns:a16="http://schemas.microsoft.com/office/drawing/2014/main" id="{B46AE36A-6DD5-0D43-C6D8-E4ECDEDF7668}"/>
+              </a:ext>
+            </a:extLst>
+          </p:cNvPr>
+          <p:cNvPicPr>
+            <a:picLocks noChangeAspect="1"/>
+          </p:cNvPicPr>
+          <p:nvPr/>
+        </p:nvPicPr>
+        <p:blipFill>
+          <a:blip r:embed="rId3" cstate="email">
+            <a:extLst>
+              <a:ext uri="{28A0092B-C50C-407E-A947-70E740481C1C}">
+                <a14:useLocalDpi xmlns:a14="http://schemas.microsoft.com/office/drawing/2010/main"/>
+              </a:ext>
+            </a:extLst>
+          </a:blip>
+          <a:stretch>
+            <a:fillRect/>
+          </a:stretch>
+        </p:blipFill>
+        <p:spPr>
+          <a:xfrm>
+            <a:off x="8991672" y="175310"/>
+            <a:ext cx="3033181" cy="483309"/>
+          </a:xfrm>
+          <a:prstGeom prst="rect">
+            <a:avLst/>
+          </a:prstGeom>
+        </p:spPr>
+      </p:pic>
+    </p:spTree>
+    <p:extLst>
+      <p:ext uri="{BB962C8B-B14F-4D97-AF65-F5344CB8AC3E}">
+        <p14:creationId xmlns:p14="http://schemas.microsoft.com/office/powerpoint/2010/main" val="2757538078"/>
       </p:ext>
     </p:extLst>
   </p:cSld>

--- a/crypto_02_Ether_POS.pptx
+++ b/crypto_02_Ether_POS.pptx
@@ -6930,8 +6930,8 @@
         </p:nvSpPr>
         <p:spPr>
           <a:xfrm>
-            <a:off x="0" y="0"/>
-            <a:ext cx="4015047" cy="369332"/>
+            <a:off x="0" y="41967"/>
+            <a:ext cx="4015047" cy="523220"/>
           </a:xfrm>
           <a:prstGeom prst="rect">
             <a:avLst/>
@@ -6945,8 +6945,8 @@
           <a:lstStyle/>
           <a:p>
             <a:r>
-              <a:rPr lang="en-US" b="1"/>
-              <a:t>Will BlackRock Take Over Ethereum?</a:t>
+              <a:rPr lang="en-US" sz="2800" b="1"/>
+              <a:t>Can POS be attacked?</a:t>
             </a:r>
           </a:p>
         </p:txBody>
@@ -6965,7 +6965,7 @@
         </p:nvSpPr>
         <p:spPr>
           <a:xfrm>
-            <a:off x="241069" y="866044"/>
+            <a:off x="7173883" y="2119909"/>
             <a:ext cx="4131425" cy="523220"/>
           </a:xfrm>
           <a:prstGeom prst="rect">
@@ -7010,8 +7010,8 @@
         </p:nvSpPr>
         <p:spPr>
           <a:xfrm>
-            <a:off x="241069" y="1571105"/>
-            <a:ext cx="4680066" cy="2677656"/>
+            <a:off x="7173883" y="2824970"/>
+            <a:ext cx="4680066" cy="2893100"/>
           </a:xfrm>
           <a:prstGeom prst="rect">
             <a:avLst/>
@@ -7060,7 +7060,7 @@
             </a:pPr>
             <a:r>
               <a:rPr lang="en-US" sz="1400"/>
-              <a:t>BlackRock, Goldman Sachs, etc.  can borrow money from the Fed at very low rate (much lower than anyone else), and then stake at Ethereum at higher rate. Thus making money on the spread. And the more they stake – the more money they make.</a:t>
+              <a:t>Big companies like BlackRock, Goldman Sachs, etc.  can borrow money from the Fed at very low rate (much lower than anyone else), and then stake this money at Ethereum at higher rate. Thus making money on the spread. And the more they borrow and stake – the more money they make.</a:t>
             </a:r>
           </a:p>
           <a:p>
@@ -7070,7 +7070,7 @@
             </a:pPr>
             <a:r>
               <a:rPr lang="en-US" sz="1400"/>
-              <a:t>These huge companies can stake huge amounts on Ethereum – thus influencing the network.</a:t>
+              <a:t>These huge companies can stake huge amounts on Ethereum, thus influencing the network.</a:t>
             </a:r>
           </a:p>
           <a:p>
@@ -7080,7 +7080,7 @@
             </a:pPr>
             <a:r>
               <a:rPr lang="en-US" sz="1400"/>
-              <a:t>These companies are "in bed" with government – thus putting the whole network under government influence and/or control.</a:t>
+              <a:t>These companies are "in bed" with te government, thus they potentially can put the whole network under government influence and/or control.</a:t>
             </a:r>
           </a:p>
         </p:txBody>
@@ -7113,14 +7113,141 @@
         </p:blipFill>
         <p:spPr>
           <a:xfrm>
-            <a:off x="8991672" y="175310"/>
-            <a:ext cx="3033181" cy="483309"/>
+            <a:off x="10087001" y="1656521"/>
+            <a:ext cx="1766948" cy="281547"/>
           </a:xfrm>
           <a:prstGeom prst="rect">
             <a:avLst/>
           </a:prstGeom>
         </p:spPr>
       </p:pic>
+      <p:sp>
+        <p:nvSpPr>
+          <p:cNvPr id="6" name="TextBox 5">
+            <a:extLst>
+              <a:ext uri="{FF2B5EF4-FFF2-40B4-BE49-F238E27FC236}">
+                <a16:creationId xmlns:a16="http://schemas.microsoft.com/office/drawing/2014/main" id="{F1951FF4-1A1E-B01E-CC67-B800C79A0F80}"/>
+              </a:ext>
+            </a:extLst>
+          </p:cNvPr>
+          <p:cNvSpPr txBox="1"/>
+          <p:nvPr/>
+        </p:nvSpPr>
+        <p:spPr>
+          <a:xfrm>
+            <a:off x="37407" y="565187"/>
+            <a:ext cx="4680065" cy="276999"/>
+          </a:xfrm>
+          <a:prstGeom prst="rect">
+            <a:avLst/>
+          </a:prstGeom>
+          <a:noFill/>
+        </p:spPr>
+        <p:txBody>
+          <a:bodyPr wrap="square" rtlCol="0">
+            <a:spAutoFit/>
+          </a:bodyPr>
+          <a:lstStyle/>
+          <a:p>
+            <a:r>
+              <a:rPr lang="en-US" sz="1200">
+                <a:hlinkClick r:id="rId4"/>
+              </a:rPr>
+              <a:t>https://ethereum.org/en/developers/docs/consensus-mechanisms/pos/</a:t>
+            </a:r>
+            <a:endParaRPr lang="en-US" sz="1200"/>
+          </a:p>
+        </p:txBody>
+      </p:sp>
+      <p:sp>
+        <p:nvSpPr>
+          <p:cNvPr id="7" name="TextBox 6">
+            <a:extLst>
+              <a:ext uri="{FF2B5EF4-FFF2-40B4-BE49-F238E27FC236}">
+                <a16:creationId xmlns:a16="http://schemas.microsoft.com/office/drawing/2014/main" id="{F143EDFD-2DB7-75F1-3170-4616C040A656}"/>
+              </a:ext>
+            </a:extLst>
+          </p:cNvPr>
+          <p:cNvSpPr txBox="1"/>
+          <p:nvPr/>
+        </p:nvSpPr>
+        <p:spPr>
+          <a:xfrm>
+            <a:off x="162098" y="1300463"/>
+            <a:ext cx="4680066" cy="2462213"/>
+          </a:xfrm>
+          <a:prstGeom prst="rect">
+            <a:avLst/>
+          </a:prstGeom>
+          <a:solidFill>
+            <a:schemeClr val="accent4">
+              <a:lumMod val="20000"/>
+              <a:lumOff val="80000"/>
+            </a:schemeClr>
+          </a:solidFill>
+          <a:ln>
+            <a:solidFill>
+              <a:schemeClr val="accent1"/>
+            </a:solidFill>
+          </a:ln>
+        </p:spPr>
+        <p:txBody>
+          <a:bodyPr wrap="square" rtlCol="0">
+            <a:spAutoFit/>
+          </a:bodyPr>
+          <a:lstStyle/>
+          <a:p>
+            <a:r>
+              <a:rPr lang="en-US" sz="1400" b="1">
+                <a:solidFill>
+                  <a:srgbClr val="00B050"/>
+                </a:solidFill>
+              </a:rPr>
+              <a:t>Benefits of POS concensus:</a:t>
+            </a:r>
+          </a:p>
+          <a:p>
+            <a:pPr marL="285750" indent="-285750">
+              <a:buFont typeface="Arial" panose="020B0604020202020204" pitchFamily="34" charset="0"/>
+              <a:buChar char="•"/>
+            </a:pPr>
+            <a:r>
+              <a:rPr lang="en-US" sz="1400"/>
+              <a:t>reduced centralization risk: POS leads to more nodes securing the network</a:t>
+            </a:r>
+          </a:p>
+          <a:p>
+            <a:pPr marL="285750" indent="-285750">
+              <a:buFont typeface="Arial" panose="020B0604020202020204" pitchFamily="34" charset="0"/>
+              <a:buChar char="•"/>
+            </a:pPr>
+            <a:r>
+              <a:rPr lang="en-US" sz="1400"/>
+              <a:t>because of the low energy requirement less ETH issuance is required to incentivize participation</a:t>
+            </a:r>
+          </a:p>
+          <a:p>
+            <a:pPr marL="285750" indent="-285750">
+              <a:buFont typeface="Arial" panose="020B0604020202020204" pitchFamily="34" charset="0"/>
+              <a:buChar char="•"/>
+            </a:pPr>
+            <a:r>
+              <a:rPr lang="en-US" sz="1400"/>
+              <a:t>economic penalties for misbehaviour make 51% style attacks exponentially more costly for an attacker compared to PoW (proof-of-work)</a:t>
+            </a:r>
+          </a:p>
+          <a:p>
+            <a:pPr marL="285750" indent="-285750">
+              <a:buFont typeface="Arial" panose="020B0604020202020204" pitchFamily="34" charset="0"/>
+              <a:buChar char="•"/>
+            </a:pPr>
+            <a:r>
+              <a:rPr lang="en-US" sz="1400"/>
+              <a:t>the community can resort to social recovery of an honest chain if a 51% attack were to overcome the crypto-economic defenses.</a:t>
+            </a:r>
+          </a:p>
+        </p:txBody>
+      </p:sp>
     </p:spTree>
     <p:extLst>
       <p:ext uri="{BB962C8B-B14F-4D97-AF65-F5344CB8AC3E}">

--- a/crypto_02_Ether_POS.pptx
+++ b/crypto_02_Ether_POS.pptx
@@ -5,7 +5,7 @@
     <p:sldMasterId id="2147483648" r:id="rId1"/>
   </p:sldMasterIdLst>
   <p:notesMasterIdLst>
-    <p:notesMasterId r:id="rId10"/>
+    <p:notesMasterId r:id="rId11"/>
   </p:notesMasterIdLst>
   <p:sldIdLst>
     <p:sldId id="284" r:id="rId2"/>
@@ -16,6 +16,7 @@
     <p:sldId id="289" r:id="rId7"/>
     <p:sldId id="290" r:id="rId8"/>
     <p:sldId id="293" r:id="rId9"/>
+    <p:sldId id="294" r:id="rId10"/>
   </p:sldIdLst>
   <p:sldSz cx="12192000" cy="6858000"/>
   <p:notesSz cx="6858000" cy="9144000"/>
@@ -203,7 +204,7 @@
           </a:lstStyle>
           <a:p>
             <a:fld id="{1D50B18A-2CB0-B248-A23A-CF200D8516DA}" type="datetimeFigureOut">
-              <a:t>5/17/22</a:t>
+              <a:t>5/18/22</a:t>
             </a:fld>
             <a:endParaRPr lang="en-US"/>
           </a:p>
@@ -747,7 +748,7 @@
           <a:lstStyle/>
           <a:p>
             <a:fld id="{6FB464A9-1D0A-E949-92B2-EB494C191964}" type="datetimeFigureOut">
-              <a:t>5/17/22</a:t>
+              <a:t>5/18/22</a:t>
             </a:fld>
             <a:endParaRPr lang="en-US"/>
           </a:p>
@@ -943,7 +944,7 @@
           <a:lstStyle/>
           <a:p>
             <a:fld id="{6FB464A9-1D0A-E949-92B2-EB494C191964}" type="datetimeFigureOut">
-              <a:t>5/17/22</a:t>
+              <a:t>5/18/22</a:t>
             </a:fld>
             <a:endParaRPr lang="en-US"/>
           </a:p>
@@ -1149,7 +1150,7 @@
           <a:lstStyle/>
           <a:p>
             <a:fld id="{6FB464A9-1D0A-E949-92B2-EB494C191964}" type="datetimeFigureOut">
-              <a:t>5/17/22</a:t>
+              <a:t>5/18/22</a:t>
             </a:fld>
             <a:endParaRPr lang="en-US"/>
           </a:p>
@@ -1345,7 +1346,7 @@
           <a:lstStyle/>
           <a:p>
             <a:fld id="{6FB464A9-1D0A-E949-92B2-EB494C191964}" type="datetimeFigureOut">
-              <a:t>5/17/22</a:t>
+              <a:t>5/18/22</a:t>
             </a:fld>
             <a:endParaRPr lang="en-US"/>
           </a:p>
@@ -1618,7 +1619,7 @@
           <a:lstStyle/>
           <a:p>
             <a:fld id="{6FB464A9-1D0A-E949-92B2-EB494C191964}" type="datetimeFigureOut">
-              <a:t>5/17/22</a:t>
+              <a:t>5/18/22</a:t>
             </a:fld>
             <a:endParaRPr lang="en-US"/>
           </a:p>
@@ -1881,7 +1882,7 @@
           <a:lstStyle/>
           <a:p>
             <a:fld id="{6FB464A9-1D0A-E949-92B2-EB494C191964}" type="datetimeFigureOut">
-              <a:t>5/17/22</a:t>
+              <a:t>5/18/22</a:t>
             </a:fld>
             <a:endParaRPr lang="en-US"/>
           </a:p>
@@ -2291,7 +2292,7 @@
           <a:lstStyle/>
           <a:p>
             <a:fld id="{6FB464A9-1D0A-E949-92B2-EB494C191964}" type="datetimeFigureOut">
-              <a:t>5/17/22</a:t>
+              <a:t>5/18/22</a:t>
             </a:fld>
             <a:endParaRPr lang="en-US"/>
           </a:p>
@@ -2430,7 +2431,7 @@
           <a:lstStyle/>
           <a:p>
             <a:fld id="{6FB464A9-1D0A-E949-92B2-EB494C191964}" type="datetimeFigureOut">
-              <a:t>5/17/22</a:t>
+              <a:t>5/18/22</a:t>
             </a:fld>
             <a:endParaRPr lang="en-US"/>
           </a:p>
@@ -2541,7 +2542,7 @@
           <a:lstStyle/>
           <a:p>
             <a:fld id="{6FB464A9-1D0A-E949-92B2-EB494C191964}" type="datetimeFigureOut">
-              <a:t>5/17/22</a:t>
+              <a:t>5/18/22</a:t>
             </a:fld>
             <a:endParaRPr lang="en-US"/>
           </a:p>
@@ -2850,7 +2851,7 @@
           <a:lstStyle/>
           <a:p>
             <a:fld id="{6FB464A9-1D0A-E949-92B2-EB494C191964}" type="datetimeFigureOut">
-              <a:t>5/17/22</a:t>
+              <a:t>5/18/22</a:t>
             </a:fld>
             <a:endParaRPr lang="en-US"/>
           </a:p>
@@ -3136,7 +3137,7 @@
           <a:lstStyle/>
           <a:p>
             <a:fld id="{6FB464A9-1D0A-E949-92B2-EB494C191964}" type="datetimeFigureOut">
-              <a:t>5/17/22</a:t>
+              <a:t>5/18/22</a:t>
             </a:fld>
             <a:endParaRPr lang="en-US"/>
           </a:p>
@@ -3375,7 +3376,7 @@
           </a:lstStyle>
           <a:p>
             <a:fld id="{6FB464A9-1D0A-E949-92B2-EB494C191964}" type="datetimeFigureOut">
-              <a:t>5/17/22</a:t>
+              <a:t>5/18/22</a:t>
             </a:fld>
             <a:endParaRPr lang="en-US"/>
           </a:p>
@@ -3840,7 +3841,7 @@
         </p:nvSpPr>
         <p:spPr>
           <a:xfrm>
-            <a:off x="0" y="527771"/>
+            <a:off x="0" y="428018"/>
             <a:ext cx="4231178" cy="646331"/>
           </a:xfrm>
           <a:prstGeom prst="rect">
@@ -3911,8 +3912,8 @@
         </p:nvSpPr>
         <p:spPr>
           <a:xfrm>
-            <a:off x="1" y="1385555"/>
-            <a:ext cx="7356764" cy="4616648"/>
+            <a:off x="0" y="1135929"/>
+            <a:ext cx="7356764" cy="5047536"/>
           </a:xfrm>
           <a:prstGeom prst="rect">
             <a:avLst/>
@@ -4180,22 +4181,31 @@
                   <a:srgbClr val="00B050"/>
                 </a:solidFill>
               </a:rPr>
-              <a:t>Programming languages used in Ethereum:</a:t>
-            </a:r>
-            <a:br>
+              <a:t>Programming languages used in Ethereum: </a:t>
+            </a:r>
+            <a:r>
               <a:rPr lang="en-US" sz="1400" b="1">
                 <a:solidFill>
-                  <a:srgbClr val="00B050"/>
-                </a:solidFill>
-              </a:rPr>
-            </a:br>
+                  <a:srgbClr val="FF0000"/>
+                </a:solidFill>
+              </a:rPr>
+              <a:t>Vyper</a:t>
+            </a:r>
+            <a:r>
+              <a:rPr lang="en-US" sz="1400"/>
+              <a:t> – similar to Python, </a:t>
+            </a:r>
             <a:r>
               <a:rPr lang="en-US" sz="1400" b="1">
                 <a:solidFill>
-                  <a:srgbClr val="00B050"/>
-                </a:solidFill>
-              </a:rPr>
-              <a:t>.. </a:t>
+                  <a:srgbClr val="FF0000"/>
+                </a:solidFill>
+              </a:rPr>
+              <a:t>Solidity</a:t>
+            </a:r>
+            <a:r>
+              <a:rPr lang="en-US" sz="1400"/>
+              <a:t> – similar to JavaScript, </a:t>
             </a:r>
             <a:r>
               <a:rPr lang="en-US" sz="1400" b="1">
@@ -4203,56 +4213,11 @@
                   <a:srgbClr val="FF0000"/>
                 </a:solidFill>
               </a:rPr>
-              <a:t>Vyper</a:t>
-            </a:r>
-            <a:r>
-              <a:rPr lang="en-US" sz="1400"/>
-              <a:t> – similar to Python</a:t>
-            </a:r>
-            <a:br>
-              <a:rPr lang="en-US" sz="1400"/>
-            </a:br>
-            <a:r>
-              <a:rPr lang="en-US" sz="1400"/>
-              <a:t>.. </a:t>
-            </a:r>
-            <a:r>
-              <a:rPr lang="en-US" sz="1400" b="1">
-                <a:solidFill>
-                  <a:srgbClr val="FF0000"/>
-                </a:solidFill>
-              </a:rPr>
-              <a:t>Solidity</a:t>
-            </a:r>
-            <a:r>
-              <a:rPr lang="en-US" sz="1400"/>
-              <a:t> – similar to JavaScript</a:t>
-            </a:r>
-            <a:br>
-              <a:rPr lang="en-US" sz="1400"/>
-            </a:br>
-            <a:r>
-              <a:rPr lang="en-US" sz="1400"/>
-              <a:t>.. </a:t>
-            </a:r>
-            <a:r>
-              <a:rPr lang="en-US" sz="1400" b="1">
-                <a:solidFill>
-                  <a:srgbClr val="FF0000"/>
-                </a:solidFill>
-              </a:rPr>
               <a:t>Serpent</a:t>
             </a:r>
             <a:r>
               <a:rPr lang="en-US" sz="1400"/>
-              <a:t> – similar to Python, not recommended</a:t>
-            </a:r>
-            <a:br>
-              <a:rPr lang="en-US" sz="1400"/>
-            </a:br>
-            <a:r>
-              <a:rPr lang="en-US" sz="1400"/>
-              <a:t>.. </a:t>
+              <a:t> – similar to Python, not recommended, </a:t>
             </a:r>
             <a:r>
               <a:rPr lang="en-US" sz="1400" b="1">
@@ -4275,7 +4240,60 @@
               </a:rPr>
               <a:t>https://merunasgrincalaitis.medium.com/dont-code-another-smart-contract-without-understanding-the-4-languages-in-10-minutes-first-1c2dea165fcf</a:t>
             </a:r>
+            <a:r>
+              <a:rPr lang="en-US" sz="1400"/>
+              <a:t> </a:t>
+            </a:r>
+          </a:p>
+          <a:p>
+            <a:pPr marL="380990" indent="-380990">
+              <a:buFont typeface="Arial" panose="020B0604020202020204" pitchFamily="34" charset="0"/>
+              <a:buChar char="•"/>
+            </a:pPr>
+            <a:r>
+              <a:rPr lang="en-US" sz="1400"/>
+              <a:t>Approx. 25% of all Ethereum workloads in the world run on AWS (Amazon)</a:t>
+            </a:r>
+            <a:br>
+              <a:rPr lang="en-US" sz="1400"/>
+            </a:br>
+            <a:r>
+              <a:rPr lang="en-US" sz="1400">
+                <a:hlinkClick r:id="rId7"/>
+              </a:rPr>
+              <a:t>https://www.ethernodes.org/network-types</a:t>
+            </a:r>
             <a:endParaRPr lang="en-US" sz="1400"/>
+          </a:p>
+          <a:p>
+            <a:pPr marL="380990" indent="-380990">
+              <a:buFont typeface="Arial" panose="020B0604020202020204" pitchFamily="34" charset="0"/>
+              <a:buChar char="•"/>
+            </a:pPr>
+            <a:r>
+              <a:rPr lang="en-US" sz="1400"/>
+              <a:t>Eterium is CryptoSecurity (very good video) - </a:t>
+            </a:r>
+            <a:r>
+              <a:rPr lang="en-US" sz="1400">
+                <a:hlinkClick r:id="rId8"/>
+              </a:rPr>
+              <a:t>https://twitter.com/rohunvora/status/1423082183195983874</a:t>
+            </a:r>
+            <a:r>
+              <a:rPr lang="en-US" sz="1400"/>
+              <a:t> </a:t>
+            </a:r>
+          </a:p>
+          <a:p>
+            <a:pPr marL="380990" indent="-380990">
+              <a:buFont typeface="Arial" panose="020B0604020202020204" pitchFamily="34" charset="0"/>
+              <a:buChar char="•"/>
+            </a:pPr>
+            <a:r>
+              <a:rPr lang="en-US" sz="1400"/>
+              <a:t>But in 2018 SEC has announced that Ether is not a security</a:t>
+            </a:r>
           </a:p>
         </p:txBody>
       </p:sp>
@@ -4294,7 +4312,7 @@
           <p:nvPr/>
         </p:nvPicPr>
         <p:blipFill>
-          <a:blip r:embed="rId7" cstate="email">
+          <a:blip r:embed="rId9" cstate="email">
             <a:extLst>
               <a:ext uri="{28A0092B-C50C-407E-A947-70E740481C1C}">
                 <a14:useLocalDpi xmlns:a14="http://schemas.microsoft.com/office/drawing/2010/main"/>
@@ -4440,7 +4458,7 @@
           <p:nvPr/>
         </p:nvPicPr>
         <p:blipFill>
-          <a:blip r:embed="rId8" cstate="email">
+          <a:blip r:embed="rId10" cstate="email">
             <a:extLst>
               <a:ext uri="{28A0092B-C50C-407E-A947-70E740481C1C}">
                 <a14:useLocalDpi xmlns:a14="http://schemas.microsoft.com/office/drawing/2010/main"/>
@@ -4476,7 +4494,7 @@
           <p:nvPr/>
         </p:nvPicPr>
         <p:blipFill>
-          <a:blip r:embed="rId9" cstate="email">
+          <a:blip r:embed="rId11" cstate="email">
             <a:extLst>
               <a:ext uri="{28A0092B-C50C-407E-A947-70E740481C1C}">
                 <a14:useLocalDpi xmlns:a14="http://schemas.microsoft.com/office/drawing/2010/main"/>
@@ -4630,7 +4648,7 @@
           <p:nvPr/>
         </p:nvPicPr>
         <p:blipFill>
-          <a:blip r:embed="rId10" cstate="email">
+          <a:blip r:embed="rId12" cstate="email">
             <a:extLst>
               <a:ext uri="{28A0092B-C50C-407E-A947-70E740481C1C}">
                 <a14:useLocalDpi xmlns:a14="http://schemas.microsoft.com/office/drawing/2010/main"/>
@@ -4666,7 +4684,7 @@
           <p:nvPr/>
         </p:nvPicPr>
         <p:blipFill>
-          <a:blip r:embed="rId11" cstate="email">
+          <a:blip r:embed="rId13" cstate="email">
             <a:extLst>
               <a:ext uri="{28A0092B-C50C-407E-A947-70E740481C1C}">
                 <a14:useLocalDpi xmlns:a14="http://schemas.microsoft.com/office/drawing/2010/main"/>
@@ -7173,7 +7191,7 @@
         </p:nvSpPr>
         <p:spPr>
           <a:xfrm>
-            <a:off x="162098" y="1300463"/>
+            <a:off x="153786" y="1088407"/>
             <a:ext cx="4680066" cy="2462213"/>
           </a:xfrm>
           <a:prstGeom prst="rect">
@@ -7252,6 +7270,297 @@
     <p:extLst>
       <p:ext uri="{BB962C8B-B14F-4D97-AF65-F5344CB8AC3E}">
         <p14:creationId xmlns:p14="http://schemas.microsoft.com/office/powerpoint/2010/main" val="2757538078"/>
+      </p:ext>
+    </p:extLst>
+  </p:cSld>
+  <p:clrMapOvr>
+    <a:masterClrMapping/>
+  </p:clrMapOvr>
+</p:sld>
+</file>
+
+<file path=ppt/slides/slide9.xml><?xml version="1.0" encoding="utf-8"?>
+<p:sld xmlns:a="http://schemas.openxmlformats.org/drawingml/2006/main" xmlns:r="http://schemas.openxmlformats.org/officeDocument/2006/relationships" xmlns:p="http://schemas.openxmlformats.org/presentationml/2006/main">
+  <p:cSld>
+    <p:spTree>
+      <p:nvGrpSpPr>
+        <p:cNvPr id="1" name=""/>
+        <p:cNvGrpSpPr/>
+        <p:nvPr/>
+      </p:nvGrpSpPr>
+      <p:grpSpPr>
+        <a:xfrm>
+          <a:off x="0" y="0"/>
+          <a:ext cx="0" cy="0"/>
+          <a:chOff x="0" y="0"/>
+          <a:chExt cx="0" cy="0"/>
+        </a:xfrm>
+      </p:grpSpPr>
+      <p:sp>
+        <p:nvSpPr>
+          <p:cNvPr id="2" name="TextBox 1">
+            <a:extLst>
+              <a:ext uri="{FF2B5EF4-FFF2-40B4-BE49-F238E27FC236}">
+                <a16:creationId xmlns:a16="http://schemas.microsoft.com/office/drawing/2014/main" id="{F9BB619D-CE8E-C95B-3B68-E92069B62039}"/>
+              </a:ext>
+            </a:extLst>
+          </p:cNvPr>
+          <p:cNvSpPr txBox="1"/>
+          <p:nvPr/>
+        </p:nvSpPr>
+        <p:spPr>
+          <a:xfrm>
+            <a:off x="214743" y="1272001"/>
+            <a:ext cx="10216190" cy="4616648"/>
+          </a:xfrm>
+          <a:prstGeom prst="rect">
+            <a:avLst/>
+          </a:prstGeom>
+          <a:noFill/>
+        </p:spPr>
+        <p:txBody>
+          <a:bodyPr wrap="square" rtlCol="0">
+            <a:spAutoFit/>
+          </a:bodyPr>
+          <a:lstStyle/>
+          <a:p>
+            <a:r>
+              <a:rPr lang="en-US" sz="1400"/>
+              <a:t>Vitalik Attacks Ethereum</a:t>
+            </a:r>
+          </a:p>
+          <a:p>
+            <a:r>
+              <a:rPr lang="en-US" sz="1400">
+                <a:hlinkClick r:id="rId2"/>
+              </a:rPr>
+              <a:t>https://www.youtube.com/watch?v=Zlz1DmmdlwI</a:t>
+            </a:r>
+            <a:endParaRPr lang="en-US" sz="1400"/>
+          </a:p>
+          <a:p>
+            <a:endParaRPr lang="en-US" sz="1400"/>
+          </a:p>
+          <a:p>
+            <a:endParaRPr lang="en-US" sz="1400"/>
+          </a:p>
+          <a:p>
+            <a:r>
+              <a:rPr lang="en-US" sz="1400"/>
+              <a:t>Ethereum:</a:t>
+            </a:r>
+          </a:p>
+          <a:p>
+            <a:pPr marL="285750" indent="-285750">
+              <a:buFont typeface="Arial" panose="020B0604020202020204" pitchFamily="34" charset="0"/>
+              <a:buChar char="•"/>
+            </a:pPr>
+            <a:r>
+              <a:rPr lang="en-US" sz="1400"/>
+              <a:t>lacks long-term stability</a:t>
+            </a:r>
+          </a:p>
+          <a:p>
+            <a:pPr marL="285750" indent="-285750">
+              <a:buFont typeface="Arial" panose="020B0604020202020204" pitchFamily="34" charset="0"/>
+              <a:buChar char="•"/>
+            </a:pPr>
+            <a:r>
+              <a:rPr lang="en-US" sz="1400"/>
+              <a:t>fragile, overly complicated</a:t>
+            </a:r>
+          </a:p>
+          <a:p>
+            <a:pPr marL="285750" indent="-285750">
+              <a:buFont typeface="Arial" panose="020B0604020202020204" pitchFamily="34" charset="0"/>
+              <a:buChar char="•"/>
+            </a:pPr>
+            <a:r>
+              <a:rPr lang="en-US" sz="1400"/>
+              <a:t>highly cenralized (uses </a:t>
+            </a:r>
+            <a:r>
+              <a:rPr lang="en-US" sz="1400">
+                <a:hlinkClick r:id="rId3"/>
+              </a:rPr>
+              <a:t>https://infura.io</a:t>
+            </a:r>
+            <a:r>
+              <a:rPr lang="en-US" sz="1400"/>
+              <a:t> and AWS)</a:t>
+            </a:r>
+          </a:p>
+          <a:p>
+            <a:pPr marL="285750" indent="-285750">
+              <a:buFont typeface="Arial" panose="020B0604020202020204" pitchFamily="34" charset="0"/>
+              <a:buChar char="•"/>
+            </a:pPr>
+            <a:r>
+              <a:rPr lang="en-US" sz="1400"/>
+              <a:t>constantly hard-forking at Vitaliks' request</a:t>
+            </a:r>
+          </a:p>
+          <a:p>
+            <a:pPr marL="285750" indent="-285750">
+              <a:buFont typeface="Arial" panose="020B0604020202020204" pitchFamily="34" charset="0"/>
+              <a:buChar char="•"/>
+            </a:pPr>
+            <a:r>
+              <a:rPr lang="en-US" sz="1400"/>
+              <a:t>Runs many worthless ponzi protocols</a:t>
+            </a:r>
+          </a:p>
+          <a:p>
+            <a:pPr marL="285750" indent="-285750">
+              <a:buFont typeface="Arial" panose="020B0604020202020204" pitchFamily="34" charset="0"/>
+              <a:buChar char="•"/>
+            </a:pPr>
+            <a:r>
+              <a:rPr lang="en-US" sz="1400"/>
+              <a:t>Ethereum development closely associated with banks (JPMorgan, Joe Lubin, etc.)</a:t>
+            </a:r>
+          </a:p>
+          <a:p>
+            <a:endParaRPr lang="en-US" sz="1400"/>
+          </a:p>
+          <a:p>
+            <a:r>
+              <a:rPr lang="en-US" sz="1400"/>
+              <a:t>Links:</a:t>
+            </a:r>
+          </a:p>
+          <a:p>
+            <a:pPr marL="285750" indent="-285750">
+              <a:buFont typeface="Arial" panose="020B0604020202020204" pitchFamily="34" charset="0"/>
+              <a:buChar char="•"/>
+            </a:pPr>
+            <a:r>
+              <a:rPr lang="en-US" sz="1400"/>
+              <a:t>Vitalik's thread - </a:t>
+            </a:r>
+            <a:r>
+              <a:rPr lang="en-US" sz="1400">
+                <a:hlinkClick r:id="rId4"/>
+              </a:rPr>
+              <a:t>https://twitter.com/VitalikButerin/status/1526378787855736832</a:t>
+            </a:r>
+            <a:endParaRPr lang="en-US" sz="1400"/>
+          </a:p>
+          <a:p>
+            <a:pPr marL="285750" indent="-285750">
+              <a:buFont typeface="Arial" panose="020B0604020202020204" pitchFamily="34" charset="0"/>
+              <a:buChar char="•"/>
+            </a:pPr>
+            <a:r>
+              <a:rPr lang="en-US" sz="1400"/>
+              <a:t>Ethereum Foundation And World Econimic Forum - </a:t>
+            </a:r>
+            <a:r>
+              <a:rPr lang="en-US" sz="1400">
+                <a:hlinkClick r:id="rId5"/>
+              </a:rPr>
+              <a:t>https://www.weforum.org/agenda/authors/aya-miyaguchi</a:t>
+            </a:r>
+            <a:endParaRPr lang="en-US" sz="1400"/>
+          </a:p>
+          <a:p>
+            <a:pPr marL="285750" indent="-285750">
+              <a:buFont typeface="Arial" panose="020B0604020202020204" pitchFamily="34" charset="0"/>
+              <a:buChar char="•"/>
+            </a:pPr>
+            <a:r>
+              <a:rPr lang="en-US" sz="1400"/>
+              <a:t>Ethereum Is Banker Coin (Shocking Revelations) - </a:t>
+            </a:r>
+            <a:r>
+              <a:rPr lang="en-US" sz="1400">
+                <a:hlinkClick r:id="rId6"/>
+              </a:rPr>
+              <a:t>https://www.youtube.com/watch?v=YDmwyyhpqTE</a:t>
+            </a:r>
+            <a:endParaRPr lang="en-US" sz="1400"/>
+          </a:p>
+          <a:p>
+            <a:pPr marL="285750" indent="-285750">
+              <a:buFont typeface="Arial" panose="020B0604020202020204" pitchFamily="34" charset="0"/>
+              <a:buChar char="•"/>
+            </a:pPr>
+            <a:r>
+              <a:rPr lang="en-US" sz="1400"/>
+              <a:t>ethereum is still the mother asshole from which all shitcoins spring forth - </a:t>
+            </a:r>
+            <a:r>
+              <a:rPr lang="en-US" sz="1400">
+                <a:hlinkClick r:id="rId7"/>
+              </a:rPr>
+              <a:t>https://twitter.com/kani_x_/status/1526479076902391808</a:t>
+            </a:r>
+            <a:endParaRPr lang="en-US" sz="1400"/>
+          </a:p>
+          <a:p>
+            <a:pPr marL="285750" indent="-285750">
+              <a:buFont typeface="Arial" panose="020B0604020202020204" pitchFamily="34" charset="0"/>
+              <a:buChar char="•"/>
+            </a:pPr>
+            <a:r>
+              <a:rPr lang="en-US" sz="1400"/>
+              <a:t>Bored Weird Vitalik Club - </a:t>
+            </a:r>
+            <a:r>
+              <a:rPr lang="en-US" sz="1400">
+                <a:hlinkClick r:id="rId8"/>
+              </a:rPr>
+              <a:t>https://weirdvitalik.com</a:t>
+            </a:r>
+            <a:endParaRPr lang="en-US" sz="1400"/>
+          </a:p>
+          <a:p>
+            <a:pPr marL="285750" indent="-285750">
+              <a:buFont typeface="Arial" panose="020B0604020202020204" pitchFamily="34" charset="0"/>
+              <a:buChar char="•"/>
+            </a:pPr>
+            <a:r>
+              <a:rPr lang="en-US" sz="1400"/>
+              <a:t>Environment concerns - </a:t>
+            </a:r>
+            <a:r>
+              <a:rPr lang="en-US" sz="1400">
+                <a:hlinkClick r:id="rId9"/>
+              </a:rPr>
+              <a:t>https://fortune.com/2021/05/27/ethereum-founder-vitalik-buterin-proof-of-stake-environment-carbon/</a:t>
+            </a:r>
+            <a:endParaRPr lang="en-US" sz="1400"/>
+          </a:p>
+          <a:p>
+            <a:pPr marL="285750" indent="-285750">
+              <a:buFont typeface="Arial" panose="020B0604020202020204" pitchFamily="34" charset="0"/>
+              <a:buChar char="•"/>
+            </a:pPr>
+            <a:r>
+              <a:rPr lang="en-US" sz="1400"/>
+              <a:t>Vitalik post April 1, 2022 - </a:t>
+            </a:r>
+            <a:r>
+              <a:rPr lang="en-US" sz="1400">
+                <a:hlinkClick r:id="rId10"/>
+              </a:rPr>
+              <a:t>https://vitalik.ca/general/2022/04/01/maximalist.html</a:t>
+            </a:r>
+            <a:endParaRPr lang="en-US" sz="1400"/>
+          </a:p>
+          <a:p>
+            <a:pPr marL="285750" indent="-285750">
+              <a:buFont typeface="Arial" panose="020B0604020202020204" pitchFamily="34" charset="0"/>
+              <a:buChar char="•"/>
+            </a:pPr>
+            <a:endParaRPr lang="en-US" sz="1400"/>
+          </a:p>
+        </p:txBody>
+      </p:sp>
+    </p:spTree>
+    <p:extLst>
+      <p:ext uri="{BB962C8B-B14F-4D97-AF65-F5344CB8AC3E}">
+        <p14:creationId xmlns:p14="http://schemas.microsoft.com/office/powerpoint/2010/main" val="4105021430"/>
       </p:ext>
     </p:extLst>
   </p:cSld>

--- a/crypto_02_Ether_POS.pptx
+++ b/crypto_02_Ether_POS.pptx
@@ -204,7 +204,7 @@
           </a:lstStyle>
           <a:p>
             <a:fld id="{1D50B18A-2CB0-B248-A23A-CF200D8516DA}" type="datetimeFigureOut">
-              <a:t>5/18/22</a:t>
+              <a:t>5/20/22</a:t>
             </a:fld>
             <a:endParaRPr lang="en-US"/>
           </a:p>
@@ -748,7 +748,7 @@
           <a:lstStyle/>
           <a:p>
             <a:fld id="{6FB464A9-1D0A-E949-92B2-EB494C191964}" type="datetimeFigureOut">
-              <a:t>5/18/22</a:t>
+              <a:t>5/20/22</a:t>
             </a:fld>
             <a:endParaRPr lang="en-US"/>
           </a:p>
@@ -944,7 +944,7 @@
           <a:lstStyle/>
           <a:p>
             <a:fld id="{6FB464A9-1D0A-E949-92B2-EB494C191964}" type="datetimeFigureOut">
-              <a:t>5/18/22</a:t>
+              <a:t>5/20/22</a:t>
             </a:fld>
             <a:endParaRPr lang="en-US"/>
           </a:p>
@@ -1150,7 +1150,7 @@
           <a:lstStyle/>
           <a:p>
             <a:fld id="{6FB464A9-1D0A-E949-92B2-EB494C191964}" type="datetimeFigureOut">
-              <a:t>5/18/22</a:t>
+              <a:t>5/20/22</a:t>
             </a:fld>
             <a:endParaRPr lang="en-US"/>
           </a:p>
@@ -1346,7 +1346,7 @@
           <a:lstStyle/>
           <a:p>
             <a:fld id="{6FB464A9-1D0A-E949-92B2-EB494C191964}" type="datetimeFigureOut">
-              <a:t>5/18/22</a:t>
+              <a:t>5/20/22</a:t>
             </a:fld>
             <a:endParaRPr lang="en-US"/>
           </a:p>
@@ -1619,7 +1619,7 @@
           <a:lstStyle/>
           <a:p>
             <a:fld id="{6FB464A9-1D0A-E949-92B2-EB494C191964}" type="datetimeFigureOut">
-              <a:t>5/18/22</a:t>
+              <a:t>5/20/22</a:t>
             </a:fld>
             <a:endParaRPr lang="en-US"/>
           </a:p>
@@ -1882,7 +1882,7 @@
           <a:lstStyle/>
           <a:p>
             <a:fld id="{6FB464A9-1D0A-E949-92B2-EB494C191964}" type="datetimeFigureOut">
-              <a:t>5/18/22</a:t>
+              <a:t>5/20/22</a:t>
             </a:fld>
             <a:endParaRPr lang="en-US"/>
           </a:p>
@@ -2292,7 +2292,7 @@
           <a:lstStyle/>
           <a:p>
             <a:fld id="{6FB464A9-1D0A-E949-92B2-EB494C191964}" type="datetimeFigureOut">
-              <a:t>5/18/22</a:t>
+              <a:t>5/20/22</a:t>
             </a:fld>
             <a:endParaRPr lang="en-US"/>
           </a:p>
@@ -2431,7 +2431,7 @@
           <a:lstStyle/>
           <a:p>
             <a:fld id="{6FB464A9-1D0A-E949-92B2-EB494C191964}" type="datetimeFigureOut">
-              <a:t>5/18/22</a:t>
+              <a:t>5/20/22</a:t>
             </a:fld>
             <a:endParaRPr lang="en-US"/>
           </a:p>
@@ -2542,7 +2542,7 @@
           <a:lstStyle/>
           <a:p>
             <a:fld id="{6FB464A9-1D0A-E949-92B2-EB494C191964}" type="datetimeFigureOut">
-              <a:t>5/18/22</a:t>
+              <a:t>5/20/22</a:t>
             </a:fld>
             <a:endParaRPr lang="en-US"/>
           </a:p>
@@ -2851,7 +2851,7 @@
           <a:lstStyle/>
           <a:p>
             <a:fld id="{6FB464A9-1D0A-E949-92B2-EB494C191964}" type="datetimeFigureOut">
-              <a:t>5/18/22</a:t>
+              <a:t>5/20/22</a:t>
             </a:fld>
             <a:endParaRPr lang="en-US"/>
           </a:p>
@@ -3137,7 +3137,7 @@
           <a:lstStyle/>
           <a:p>
             <a:fld id="{6FB464A9-1D0A-E949-92B2-EB494C191964}" type="datetimeFigureOut">
-              <a:t>5/18/22</a:t>
+              <a:t>5/20/22</a:t>
             </a:fld>
             <a:endParaRPr lang="en-US"/>
           </a:p>
@@ -3376,7 +3376,7 @@
           </a:lstStyle>
           <a:p>
             <a:fld id="{6FB464A9-1D0A-E949-92B2-EB494C191964}" type="datetimeFigureOut">
-              <a:t>5/18/22</a:t>
+              <a:t>5/20/22</a:t>
             </a:fld>
             <a:endParaRPr lang="en-US"/>
           </a:p>
@@ -7487,7 +7487,7 @@
             </a:pPr>
             <a:r>
               <a:rPr lang="en-US" sz="1400"/>
-              <a:t>ethereum is still the mother asshole from which all shitcoins spring forth - </a:t>
+              <a:t>Ethereum is still the mother asshole from which all shitcoins spring forth - </a:t>
             </a:r>
             <a:r>
               <a:rPr lang="en-US" sz="1400">

--- a/crypto_02_Ether_POS.pptx
+++ b/crypto_02_Ether_POS.pptx
@@ -204,7 +204,7 @@
           </a:lstStyle>
           <a:p>
             <a:fld id="{1D50B18A-2CB0-B248-A23A-CF200D8516DA}" type="datetimeFigureOut">
-              <a:t>5/20/22</a:t>
+              <a:t>6/6/22</a:t>
             </a:fld>
             <a:endParaRPr lang="en-US"/>
           </a:p>
@@ -748,7 +748,7 @@
           <a:lstStyle/>
           <a:p>
             <a:fld id="{6FB464A9-1D0A-E949-92B2-EB494C191964}" type="datetimeFigureOut">
-              <a:t>5/20/22</a:t>
+              <a:t>6/6/22</a:t>
             </a:fld>
             <a:endParaRPr lang="en-US"/>
           </a:p>
@@ -944,7 +944,7 @@
           <a:lstStyle/>
           <a:p>
             <a:fld id="{6FB464A9-1D0A-E949-92B2-EB494C191964}" type="datetimeFigureOut">
-              <a:t>5/20/22</a:t>
+              <a:t>6/6/22</a:t>
             </a:fld>
             <a:endParaRPr lang="en-US"/>
           </a:p>
@@ -1150,7 +1150,7 @@
           <a:lstStyle/>
           <a:p>
             <a:fld id="{6FB464A9-1D0A-E949-92B2-EB494C191964}" type="datetimeFigureOut">
-              <a:t>5/20/22</a:t>
+              <a:t>6/6/22</a:t>
             </a:fld>
             <a:endParaRPr lang="en-US"/>
           </a:p>
@@ -1346,7 +1346,7 @@
           <a:lstStyle/>
           <a:p>
             <a:fld id="{6FB464A9-1D0A-E949-92B2-EB494C191964}" type="datetimeFigureOut">
-              <a:t>5/20/22</a:t>
+              <a:t>6/6/22</a:t>
             </a:fld>
             <a:endParaRPr lang="en-US"/>
           </a:p>
@@ -1619,7 +1619,7 @@
           <a:lstStyle/>
           <a:p>
             <a:fld id="{6FB464A9-1D0A-E949-92B2-EB494C191964}" type="datetimeFigureOut">
-              <a:t>5/20/22</a:t>
+              <a:t>6/6/22</a:t>
             </a:fld>
             <a:endParaRPr lang="en-US"/>
           </a:p>
@@ -1882,7 +1882,7 @@
           <a:lstStyle/>
           <a:p>
             <a:fld id="{6FB464A9-1D0A-E949-92B2-EB494C191964}" type="datetimeFigureOut">
-              <a:t>5/20/22</a:t>
+              <a:t>6/6/22</a:t>
             </a:fld>
             <a:endParaRPr lang="en-US"/>
           </a:p>
@@ -2292,7 +2292,7 @@
           <a:lstStyle/>
           <a:p>
             <a:fld id="{6FB464A9-1D0A-E949-92B2-EB494C191964}" type="datetimeFigureOut">
-              <a:t>5/20/22</a:t>
+              <a:t>6/6/22</a:t>
             </a:fld>
             <a:endParaRPr lang="en-US"/>
           </a:p>
@@ -2431,7 +2431,7 @@
           <a:lstStyle/>
           <a:p>
             <a:fld id="{6FB464A9-1D0A-E949-92B2-EB494C191964}" type="datetimeFigureOut">
-              <a:t>5/20/22</a:t>
+              <a:t>6/6/22</a:t>
             </a:fld>
             <a:endParaRPr lang="en-US"/>
           </a:p>
@@ -2542,7 +2542,7 @@
           <a:lstStyle/>
           <a:p>
             <a:fld id="{6FB464A9-1D0A-E949-92B2-EB494C191964}" type="datetimeFigureOut">
-              <a:t>5/20/22</a:t>
+              <a:t>6/6/22</a:t>
             </a:fld>
             <a:endParaRPr lang="en-US"/>
           </a:p>
@@ -2851,7 +2851,7 @@
           <a:lstStyle/>
           <a:p>
             <a:fld id="{6FB464A9-1D0A-E949-92B2-EB494C191964}" type="datetimeFigureOut">
-              <a:t>5/20/22</a:t>
+              <a:t>6/6/22</a:t>
             </a:fld>
             <a:endParaRPr lang="en-US"/>
           </a:p>
@@ -3137,7 +3137,7 @@
           <a:lstStyle/>
           <a:p>
             <a:fld id="{6FB464A9-1D0A-E949-92B2-EB494C191964}" type="datetimeFigureOut">
-              <a:t>5/20/22</a:t>
+              <a:t>6/6/22</a:t>
             </a:fld>
             <a:endParaRPr lang="en-US"/>
           </a:p>
@@ -3376,7 +3376,7 @@
           </a:lstStyle>
           <a:p>
             <a:fld id="{6FB464A9-1D0A-E949-92B2-EB494C191964}" type="datetimeFigureOut">
-              <a:t>5/20/22</a:t>
+              <a:t>6/6/22</a:t>
             </a:fld>
             <a:endParaRPr lang="en-US"/>
           </a:p>
@@ -5559,12 +5559,22 @@
         <p:spPr>
           <a:xfrm>
             <a:off x="1359025" y="1430936"/>
-            <a:ext cx="7261273" cy="3539430"/>
+            <a:ext cx="8272655" cy="3754874"/>
           </a:xfrm>
           <a:prstGeom prst="rect">
             <a:avLst/>
           </a:prstGeom>
-          <a:noFill/>
+          <a:solidFill>
+            <a:schemeClr val="accent4">
+              <a:lumMod val="20000"/>
+              <a:lumOff val="80000"/>
+            </a:schemeClr>
+          </a:solidFill>
+          <a:ln>
+            <a:solidFill>
+              <a:srgbClr val="FF0000"/>
+            </a:solidFill>
+          </a:ln>
         </p:spPr>
         <p:txBody>
           <a:bodyPr wrap="square" rtlCol="0">
@@ -5633,13 +5643,17 @@
             </a:r>
           </a:p>
           <a:p>
-            <a:endParaRPr lang="en-US" sz="1400"/>
-          </a:p>
-          <a:p>
             <a:pPr marL="380990" indent="-380990">
               <a:buFont typeface="Arial" panose="020B0604020202020204" pitchFamily="34" charset="0"/>
               <a:buChar char="•"/>
             </a:pPr>
+            <a:endParaRPr lang="en-US" sz="1400"/>
+          </a:p>
+          <a:p>
+            <a:pPr marL="380990" indent="-380990">
+              <a:buFont typeface="Arial" panose="020B0604020202020204" pitchFamily="34" charset="0"/>
+              <a:buChar char="•"/>
+            </a:pPr>
             <a:r>
               <a:rPr lang="en-US" sz="1400" b="1">
                 <a:solidFill>
@@ -5676,25 +5690,55 @@
               <a:rPr lang="en-US" sz="1400"/>
               <a:t>:</a:t>
             </a:r>
-          </a:p>
-          <a:p>
+            <a:br>
+              <a:rPr lang="en-US" sz="1400"/>
+            </a:br>
+            <a:r>
+              <a:rPr lang="en-US" sz="1400"/>
+              <a:t>Proof of stake instead of proof of work - July 11, 2011 - </a:t>
+            </a:r>
+            <a:r>
+              <a:rPr lang="en-US" sz="1400">
+                <a:hlinkClick r:id="rId3"/>
+              </a:rPr>
+              <a:t>https://bitcointalk.org/index.php?topic=27787.0</a:t>
+            </a:r>
             <a:endParaRPr lang="en-US" sz="1400"/>
           </a:p>
           <a:p>
+            <a:pPr marL="380990" indent="-380990">
+              <a:buFont typeface="Arial" panose="020B0604020202020204" pitchFamily="34" charset="0"/>
+              <a:buChar char="•"/>
+            </a:pPr>
             <a:endParaRPr lang="en-US" sz="1400"/>
           </a:p>
           <a:p>
+            <a:endParaRPr lang="en-US" sz="1400"/>
+          </a:p>
+          <a:p>
             <a:r>
               <a:rPr lang="en-US" sz="1400" b="1">
                 <a:solidFill>
                   <a:srgbClr val="FF0000"/>
                 </a:solidFill>
               </a:rPr>
-              <a:t>Proof of Stake</a:t>
-            </a:r>
-            <a:r>
-              <a:rPr lang="en-US" sz="1400"/>
-              <a:t> networks in Transactions per Second (TPS): </a:t>
+              <a:t>Performance of some Proof of Stake</a:t>
+            </a:r>
+            <a:r>
+              <a:rPr lang="en-US" sz="1400"/>
+              <a:t> </a:t>
+            </a:r>
+            <a:r>
+              <a:rPr lang="en-US" sz="1400" b="1">
+                <a:solidFill>
+                  <a:srgbClr val="FF0000"/>
+                </a:solidFill>
+              </a:rPr>
+              <a:t>Networks</a:t>
+            </a:r>
+            <a:r>
+              <a:rPr lang="en-US" sz="1400"/>
+              <a:t>  (in Transactions per Second (TPS)): </a:t>
             </a:r>
             <a:br>
               <a:rPr lang="en-US" sz="1400"/>
